--- a/classes/parte-3-estadistica-inferencial/183-bootstrap-y-permutation-tests/clase-183-bootstrap-y-permutation-tests-presentacion.pptx
+++ b/classes/parte-3-estadistica-inferencial/183-bootstrap-y-permutation-tests/clase-183-bootstrap-y-permutation-tests-presentacion.pptx
@@ -4845,7 +4845,7 @@
                 </a:solidFill>
                 <a:latin typeface="Segoe UI"/>
               </a:rPr>
-              <a:t>Primer bloque ejecutable del notebook.</a:t>
+              <a:t>B resamples con reemplazo del mismo tamaño; se toman los cuantiles 2.5 % y 97.5 %.</a:t>
             </a:r>
           </a:p>
         </p:txBody>
@@ -4932,7 +4932,368 @@
                 </a:solidFill>
                 <a:latin typeface="Courier New"/>
               </a:rPr>
-              <a:t># Imports y configuración inicial</a:t>
+              <a:t>import numpy as np</a:t>
+            </a:r>
+          </a:p>
+          <a:p>
+            <a:pPr>
+              <a:defRPr sz="1200" b="0">
+                <a:solidFill>
+                  <a:srgbClr val="F8FAFC"/>
+                </a:solidFill>
+                <a:latin typeface="Courier New"/>
+              </a:defRPr>
+            </a:pPr>
+            <a:r>
+              <a:rPr sz="1200" b="0">
+                <a:solidFill>
+                  <a:srgbClr val="F8FAFC"/>
+                </a:solidFill>
+                <a:latin typeface="Courier New"/>
+              </a:rPr>
+              <a:t>from scipy import stats</a:t>
+            </a:r>
+          </a:p>
+          <a:p>
+            <a:pPr>
+              <a:defRPr sz="1200" b="0">
+                <a:solidFill>
+                  <a:srgbClr val="F8FAFC"/>
+                </a:solidFill>
+                <a:latin typeface="Courier New"/>
+              </a:defRPr>
+            </a:pPr>
+            <a:r>
+              <a:rPr sz="1200" b="0">
+                <a:solidFill>
+                  <a:srgbClr val="F8FAFC"/>
+                </a:solidFill>
+                <a:latin typeface="Courier New"/>
+              </a:rPr>
+              <a:t>import matplotlib.pyplot as plt</a:t>
+            </a:r>
+          </a:p>
+          <a:p>
+            <a:pPr>
+              <a:defRPr sz="1200" b="0">
+                <a:solidFill>
+                  <a:srgbClr val="F8FAFC"/>
+                </a:solidFill>
+                <a:latin typeface="Courier New"/>
+              </a:defRPr>
+            </a:pPr>
+            <a:r>
+              <a:rPr sz="1200" b="0">
+                <a:solidFill>
+                  <a:srgbClr val="F8FAFC"/>
+                </a:solidFill>
+                <a:latin typeface="Courier New"/>
+              </a:rPr>
+              <a:t> </a:t>
+            </a:r>
+          </a:p>
+          <a:p>
+            <a:pPr>
+              <a:defRPr sz="1200" b="0">
+                <a:solidFill>
+                  <a:srgbClr val="F8FAFC"/>
+                </a:solidFill>
+                <a:latin typeface="Courier New"/>
+              </a:defRPr>
+            </a:pPr>
+            <a:r>
+              <a:rPr sz="1200" b="0">
+                <a:solidFill>
+                  <a:srgbClr val="F8FAFC"/>
+                </a:solidFill>
+                <a:latin typeface="Courier New"/>
+              </a:rPr>
+              <a:t>rng = np.random.default_rng(42)</a:t>
+            </a:r>
+          </a:p>
+          <a:p>
+            <a:pPr>
+              <a:defRPr sz="1200" b="0">
+                <a:solidFill>
+                  <a:srgbClr val="F8FAFC"/>
+                </a:solidFill>
+                <a:latin typeface="Courier New"/>
+              </a:defRPr>
+            </a:pPr>
+            <a:r>
+              <a:rPr sz="1200" b="0">
+                <a:solidFill>
+                  <a:srgbClr val="F8FAFC"/>
+                </a:solidFill>
+                <a:latin typeface="Courier New"/>
+              </a:rPr>
+              <a:t> </a:t>
+            </a:r>
+          </a:p>
+          <a:p>
+            <a:pPr>
+              <a:defRPr sz="1200" b="0">
+                <a:solidFill>
+                  <a:srgbClr val="F8FAFC"/>
+                </a:solidFill>
+                <a:latin typeface="Courier New"/>
+              </a:defRPr>
+            </a:pPr>
+            <a:r>
+              <a:rPr sz="1200" b="0">
+                <a:solidFill>
+                  <a:srgbClr val="F8FAFC"/>
+                </a:solidFill>
+                <a:latin typeface="Courier New"/>
+              </a:rPr>
+              <a:t>tip = rng.gamma(shape=2.0, scale=1.5, size=200)   # asimétrico positivo</a:t>
+            </a:r>
+          </a:p>
+          <a:p>
+            <a:pPr>
+              <a:defRPr sz="1200" b="0">
+                <a:solidFill>
+                  <a:srgbClr val="F8FAFC"/>
+                </a:solidFill>
+                <a:latin typeface="Courier New"/>
+              </a:defRPr>
+            </a:pPr>
+            <a:r>
+              <a:rPr sz="1200" b="0">
+                <a:solidFill>
+                  <a:srgbClr val="F8FAFC"/>
+                </a:solidFill>
+                <a:latin typeface="Courier New"/>
+              </a:rPr>
+              <a:t>B = 10_000</a:t>
+            </a:r>
+          </a:p>
+          <a:p>
+            <a:pPr>
+              <a:defRPr sz="1200" b="0">
+                <a:solidFill>
+                  <a:srgbClr val="F8FAFC"/>
+                </a:solidFill>
+                <a:latin typeface="Courier New"/>
+              </a:defRPr>
+            </a:pPr>
+            <a:r>
+              <a:rPr sz="1200" b="0">
+                <a:solidFill>
+                  <a:srgbClr val="F8FAFC"/>
+                </a:solidFill>
+                <a:latin typeface="Courier New"/>
+              </a:rPr>
+              <a:t>boot_means = np.array([rng.choice(tip, size=len(tip), replace=True).mean() for _ in range(B)])</a:t>
+            </a:r>
+          </a:p>
+          <a:p>
+            <a:pPr>
+              <a:defRPr sz="1200" b="0">
+                <a:solidFill>
+                  <a:srgbClr val="F8FAFC"/>
+                </a:solidFill>
+                <a:latin typeface="Courier New"/>
+              </a:defRPr>
+            </a:pPr>
+            <a:r>
+              <a:rPr sz="1200" b="0">
+                <a:solidFill>
+                  <a:srgbClr val="F8FAFC"/>
+                </a:solidFill>
+                <a:latin typeface="Courier New"/>
+              </a:rPr>
+              <a:t>lo, hi = np.percentile(boot_means, [2.5, 97.5])</a:t>
+            </a:r>
+          </a:p>
+          <a:p>
+            <a:pPr>
+              <a:defRPr sz="1200" b="0">
+                <a:solidFill>
+                  <a:srgbClr val="F8FAFC"/>
+                </a:solidFill>
+                <a:latin typeface="Courier New"/>
+              </a:defRPr>
+            </a:pPr>
+            <a:r>
+              <a:rPr sz="1200" b="0">
+                <a:solidFill>
+                  <a:srgbClr val="F8FAFC"/>
+                </a:solidFill>
+                <a:latin typeface="Courier New"/>
+              </a:rPr>
+              <a:t>sp = stats.bootstrap((tip,), np.mean, n_resamples=B, method="percentile", random_state=rng)</a:t>
+            </a:r>
+          </a:p>
+          <a:p>
+            <a:pPr>
+              <a:defRPr sz="1200" b="0">
+                <a:solidFill>
+                  <a:srgbClr val="F8FAFC"/>
+                </a:solidFill>
+                <a:latin typeface="Courier New"/>
+              </a:defRPr>
+            </a:pPr>
+            <a:r>
+              <a:rPr sz="1200" b="0">
+                <a:solidFill>
+                  <a:srgbClr val="F8FAFC"/>
+                </a:solidFill>
+                <a:latin typeface="Courier New"/>
+              </a:rPr>
+              <a:t>print(f"manual  IC95% = ({lo:.3f}, {hi:.3f})")</a:t>
+            </a:r>
+          </a:p>
+          <a:p>
+            <a:pPr>
+              <a:defRPr sz="1200" b="0">
+                <a:solidFill>
+                  <a:srgbClr val="F8FAFC"/>
+                </a:solidFill>
+                <a:latin typeface="Courier New"/>
+              </a:defRPr>
+            </a:pPr>
+            <a:r>
+              <a:rPr sz="1200" b="0">
+                <a:solidFill>
+                  <a:srgbClr val="F8FAFC"/>
+                </a:solidFill>
+                <a:latin typeface="Courier New"/>
+              </a:rPr>
+              <a:t>print(f"scipy   IC95% = ({sp.confidence_interval.low:.3f}, {sp.confidence_interval.high:.3f})")</a:t>
+            </a:r>
+          </a:p>
+          <a:p>
+            <a:pPr>
+              <a:defRPr sz="1200" b="0">
+                <a:solidFill>
+                  <a:srgbClr val="F8FAFC"/>
+                </a:solidFill>
+                <a:latin typeface="Courier New"/>
+              </a:defRPr>
+            </a:pPr>
+            <a:r>
+              <a:rPr sz="1200" b="0">
+                <a:solidFill>
+                  <a:srgbClr val="F8FAFC"/>
+                </a:solidFill>
+                <a:latin typeface="Courier New"/>
+              </a:rPr>
+              <a:t>assert abs(lo - sp.confidence_interval.low) &lt; 0.1</a:t>
+            </a:r>
+          </a:p>
+          <a:p>
+            <a:pPr>
+              <a:defRPr sz="1200" b="0">
+                <a:solidFill>
+                  <a:srgbClr val="F8FAFC"/>
+                </a:solidFill>
+                <a:latin typeface="Courier New"/>
+              </a:defRPr>
+            </a:pPr>
+            <a:r>
+              <a:rPr sz="1200" b="0">
+                <a:solidFill>
+                  <a:srgbClr val="F8FAFC"/>
+                </a:solidFill>
+                <a:latin typeface="Courier New"/>
+              </a:rPr>
+              <a:t> </a:t>
+            </a:r>
+          </a:p>
+          <a:p>
+            <a:pPr>
+              <a:defRPr sz="1200" b="0">
+                <a:solidFill>
+                  <a:srgbClr val="F8FAFC"/>
+                </a:solidFill>
+                <a:latin typeface="Courier New"/>
+              </a:defRPr>
+            </a:pPr>
+            <a:r>
+              <a:rPr sz="1200" b="0">
+                <a:solidFill>
+                  <a:srgbClr val="F8FAFC"/>
+                </a:solidFill>
+                <a:latin typeface="Courier New"/>
+              </a:rPr>
+              <a:t>plt.figure(figsize=(6, 4))</a:t>
+            </a:r>
+          </a:p>
+          <a:p>
+            <a:pPr>
+              <a:defRPr sz="1200" b="0">
+                <a:solidFill>
+                  <a:srgbClr val="F8FAFC"/>
+                </a:solidFill>
+                <a:latin typeface="Courier New"/>
+              </a:defRPr>
+            </a:pPr>
+            <a:r>
+              <a:rPr sz="1200" b="0">
+                <a:solidFill>
+                  <a:srgbClr val="F8FAFC"/>
+                </a:solidFill>
+                <a:latin typeface="Courier New"/>
+              </a:rPr>
+              <a:t>plt.hist(boot_means, bins=50, color="darkorange", alpha=0.7)</a:t>
+            </a:r>
+          </a:p>
+          <a:p>
+            <a:pPr>
+              <a:defRPr sz="1200" b="0">
+                <a:solidFill>
+                  <a:srgbClr val="F8FAFC"/>
+                </a:solidFill>
+                <a:latin typeface="Courier New"/>
+              </a:defRPr>
+            </a:pPr>
+            <a:r>
+              <a:rPr sz="1200" b="0">
+                <a:solidFill>
+                  <a:srgbClr val="F8FAFC"/>
+                </a:solidFill>
+                <a:latin typeface="Courier New"/>
+              </a:rPr>
+              <a:t>plt.axvline(lo, color="k", ls="--"); plt.axvline(hi, color="k", ls="--")</a:t>
+            </a:r>
+          </a:p>
+          <a:p>
+            <a:pPr>
+              <a:defRPr sz="1200" b="0">
+                <a:solidFill>
+                  <a:srgbClr val="F8FAFC"/>
+                </a:solidFill>
+                <a:latin typeface="Courier New"/>
+              </a:defRPr>
+            </a:pPr>
+            <a:r>
+              <a:rPr sz="1200" b="0">
+                <a:solidFill>
+                  <a:srgbClr val="F8FAFC"/>
+                </a:solidFill>
+                <a:latin typeface="Courier New"/>
+              </a:rPr>
+              <a:t>plt.title("Distribución bootstrap de la media (IC95% percentil)")</a:t>
+            </a:r>
+          </a:p>
+          <a:p>
+            <a:pPr>
+              <a:defRPr sz="1200" b="0">
+                <a:solidFill>
+                  <a:srgbClr val="F8FAFC"/>
+                </a:solidFill>
+                <a:latin typeface="Courier New"/>
+              </a:defRPr>
+            </a:pPr>
+            <a:r>
+              <a:rPr sz="1200" b="0">
+                <a:solidFill>
+                  <a:srgbClr val="F8FAFC"/>
+                </a:solidFill>
+                <a:latin typeface="Courier New"/>
+              </a:rPr>
+              <a:t>plt.tight_layout(); plt.show()</a:t>
             </a:r>
           </a:p>
         </p:txBody>

--- a/classes/parte-3-estadistica-inferencial/183-bootstrap-y-permutation-tests/clase-183-bootstrap-y-permutation-tests-presentacion.pptx
+++ b/classes/parte-3-estadistica-inferencial/183-bootstrap-y-permutation-tests/clase-183-bootstrap-y-permutation-tests-presentacion.pptx
@@ -3272,7 +3272,7 @@
                 </a:solidFill>
                 <a:latin typeface="Segoe UI"/>
               </a:rPr>
-              <a:t>Parte: 3 — Estadística Inferencial y Causal · Fuente: ISLP, cap. 5 Resampling Methods + Efron &amp; Tibshirani, An Introduction to the Bootstrap.  Duración estimada: 85 min.</a:t>
+              <a:t>Parte: 3 — Estadística Inferencial y Causal · Fuente: ISLP, cap. 5 Resampling Methods + Efron &amp; Tibshirani, An Introduction to the Bootstrap.  Duración estimada: 85 min. · Nivel: Intermedio-Avanzado</a:t>
             </a:r>
           </a:p>
         </p:txBody>
@@ -3581,7 +3581,7 @@
                 </a:solidFill>
                 <a:latin typeface="Segoe UI"/>
               </a:rPr>
-              <a:t>Parte: 3 — Estadística Inferencial y Causal · Fuente: ISLP, cap. 5 Resampling Methods + Efron &amp; Tibshirani, An Introduction to the Bootstrap.  Duración estimada: 85 min.</a:t>
+              <a:t>Parte: 3 — Estadística Inferencial y Causal · Fuente: ISLP, cap. 5 Resampling Methods + Efron &amp; Tibshirani, An Introduction to the Bootstrap.  Duración estimada: 85 min. · Nivel: Intermedio-Avanzado</a:t>
             </a:r>
           </a:p>
         </p:txBody>
